--- a/figures/星上协议栈.pptx
+++ b/figures/星上协议栈.pptx
@@ -107,7 +107,7 @@
   <p:extLst>
     <p:ext uri="{EFAFB233-063F-42B5-8137-9DF3F51BA10A}">
       <p15:sldGuideLst xmlns:p15="http://schemas.microsoft.com/office/powerpoint/2012/main">
-        <p15:guide id="1" orient="horz" pos="2160" userDrawn="1">
+        <p15:guide id="1" orient="horz" pos="2121" userDrawn="1">
           <p15:clr>
             <a:srgbClr val="A4A3A4"/>
           </p15:clr>
@@ -2932,20 +2932,20 @@
       <p:grpSpPr/>
       <p:sp>
         <p:nvSpPr>
-          <p:cNvPr id="4" name="矩形 3"/>
+          <p:cNvPr id="14" name="矩形 13"/>
           <p:cNvSpPr/>
           <p:nvPr/>
         </p:nvSpPr>
         <p:spPr>
           <a:xfrm>
-            <a:off x="1960245" y="753110"/>
-            <a:ext cx="1226185" cy="4542155"/>
+            <a:off x="3606800" y="3099435"/>
+            <a:ext cx="1226185" cy="3274695"/>
           </a:xfrm>
           <a:prstGeom prst="rect">
             <a:avLst/>
           </a:prstGeom>
           <a:solidFill>
-            <a:schemeClr val="accent4">
+            <a:schemeClr val="accent5">
               <a:lumMod val="20000"/>
               <a:lumOff val="80000"/>
             </a:schemeClr>
@@ -2984,6 +2984,2337 @@
           </a:p>
         </p:txBody>
       </p:sp>
+      <p:sp>
+        <p:nvSpPr>
+          <p:cNvPr id="4" name="矩形 3"/>
+          <p:cNvSpPr/>
+          <p:nvPr/>
+        </p:nvSpPr>
+        <p:spPr>
+          <a:xfrm>
+            <a:off x="1109345" y="2007870"/>
+            <a:ext cx="1226185" cy="4542155"/>
+          </a:xfrm>
+          <a:prstGeom prst="rect">
+            <a:avLst/>
+          </a:prstGeom>
+          <a:solidFill>
+            <a:schemeClr val="accent4">
+              <a:lumMod val="20000"/>
+              <a:lumOff val="80000"/>
+            </a:schemeClr>
+          </a:solidFill>
+          <a:ln w="12700" cmpd="sng">
+            <a:solidFill>
+              <a:schemeClr val="accent1">
+                <a:shade val="50000"/>
+              </a:schemeClr>
+            </a:solidFill>
+            <a:prstDash val="solid"/>
+          </a:ln>
+        </p:spPr>
+        <p:style>
+          <a:lnRef idx="2">
+            <a:schemeClr val="accent1">
+              <a:lumMod val="75000"/>
+            </a:schemeClr>
+          </a:lnRef>
+          <a:fillRef idx="1">
+            <a:schemeClr val="accent1"/>
+          </a:fillRef>
+          <a:effectRef idx="0">
+            <a:srgbClr val="FFFFFF"/>
+          </a:effectRef>
+          <a:fontRef idx="minor">
+            <a:schemeClr val="lt1"/>
+          </a:fontRef>
+        </p:style>
+        <p:txBody>
+          <a:bodyPr rtlCol="0" anchor="ctr"/>
+          <a:p>
+            <a:pPr algn="ctr"/>
+            <a:endParaRPr lang="zh-CN" altLang="en-US"/>
+          </a:p>
+        </p:txBody>
+      </p:sp>
+      <p:sp>
+        <p:nvSpPr>
+          <p:cNvPr id="5" name="文本框 4"/>
+          <p:cNvSpPr txBox="1"/>
+          <p:nvPr/>
+        </p:nvSpPr>
+        <p:spPr>
+          <a:xfrm>
+            <a:off x="1262380" y="2008505"/>
+            <a:ext cx="935990" cy="645160"/>
+          </a:xfrm>
+          <a:prstGeom prst="rect">
+            <a:avLst/>
+          </a:prstGeom>
+          <a:noFill/>
+        </p:spPr>
+        <p:txBody>
+          <a:bodyPr wrap="square" rtlCol="0">
+            <a:spAutoFit/>
+          </a:bodyPr>
+          <a:p>
+            <a:r>
+              <a:rPr lang="zh-CN" altLang="en-US" b="1"/>
+              <a:t>用户</a:t>
+            </a:r>
+            <a:r>
+              <a:rPr lang="en-US" altLang="zh-CN" b="1"/>
+              <a:t>/</a:t>
+            </a:r>
+            <a:r>
+              <a:rPr lang="zh-CN" altLang="en-US" b="1"/>
+              <a:t>任务</a:t>
+            </a:r>
+            <a:r>
+              <a:rPr lang="zh-CN" altLang="en-US" b="1"/>
+              <a:t>星</a:t>
+            </a:r>
+            <a:endParaRPr lang="zh-CN" altLang="en-US" b="1"/>
+          </a:p>
+        </p:txBody>
+      </p:sp>
+      <p:sp>
+        <p:nvSpPr>
+          <p:cNvPr id="6" name="矩形 5"/>
+          <p:cNvSpPr/>
+          <p:nvPr/>
+        </p:nvSpPr>
+        <p:spPr>
+          <a:xfrm>
+            <a:off x="3355975" y="3316605"/>
+            <a:ext cx="1226185" cy="3233420"/>
+          </a:xfrm>
+          <a:prstGeom prst="rect">
+            <a:avLst/>
+          </a:prstGeom>
+          <a:solidFill>
+            <a:schemeClr val="accent5">
+              <a:lumMod val="20000"/>
+              <a:lumOff val="80000"/>
+            </a:schemeClr>
+          </a:solidFill>
+          <a:ln w="12700" cmpd="sng">
+            <a:solidFill>
+              <a:schemeClr val="accent1">
+                <a:shade val="50000"/>
+              </a:schemeClr>
+            </a:solidFill>
+            <a:prstDash val="solid"/>
+          </a:ln>
+        </p:spPr>
+        <p:style>
+          <a:lnRef idx="2">
+            <a:schemeClr val="accent1">
+              <a:lumMod val="75000"/>
+            </a:schemeClr>
+          </a:lnRef>
+          <a:fillRef idx="1">
+            <a:schemeClr val="accent1"/>
+          </a:fillRef>
+          <a:effectRef idx="0">
+            <a:srgbClr val="FFFFFF"/>
+          </a:effectRef>
+          <a:fontRef idx="minor">
+            <a:schemeClr val="lt1"/>
+          </a:fontRef>
+        </p:style>
+        <p:txBody>
+          <a:bodyPr rtlCol="0" anchor="ctr"/>
+          <a:p>
+            <a:pPr algn="ctr"/>
+            <a:endParaRPr lang="zh-CN" altLang="en-US"/>
+          </a:p>
+        </p:txBody>
+      </p:sp>
+      <p:sp>
+        <p:nvSpPr>
+          <p:cNvPr id="7" name="矩形 6"/>
+          <p:cNvSpPr/>
+          <p:nvPr/>
+        </p:nvSpPr>
+        <p:spPr>
+          <a:xfrm>
+            <a:off x="5602605" y="3317240"/>
+            <a:ext cx="1226185" cy="3232785"/>
+          </a:xfrm>
+          <a:prstGeom prst="rect">
+            <a:avLst/>
+          </a:prstGeom>
+          <a:solidFill>
+            <a:schemeClr val="accent5">
+              <a:lumMod val="20000"/>
+              <a:lumOff val="80000"/>
+            </a:schemeClr>
+          </a:solidFill>
+          <a:ln w="12700" cmpd="sng">
+            <a:solidFill>
+              <a:schemeClr val="accent1">
+                <a:shade val="50000"/>
+              </a:schemeClr>
+            </a:solidFill>
+            <a:prstDash val="solid"/>
+          </a:ln>
+        </p:spPr>
+        <p:style>
+          <a:lnRef idx="2">
+            <a:schemeClr val="accent1">
+              <a:lumMod val="75000"/>
+            </a:schemeClr>
+          </a:lnRef>
+          <a:fillRef idx="1">
+            <a:schemeClr val="accent1"/>
+          </a:fillRef>
+          <a:effectRef idx="0">
+            <a:srgbClr val="FFFFFF"/>
+          </a:effectRef>
+          <a:fontRef idx="minor">
+            <a:schemeClr val="lt1"/>
+          </a:fontRef>
+        </p:style>
+        <p:txBody>
+          <a:bodyPr rtlCol="0" anchor="ctr"/>
+          <a:p>
+            <a:pPr algn="ctr"/>
+            <a:endParaRPr lang="zh-CN" altLang="en-US"/>
+          </a:p>
+        </p:txBody>
+      </p:sp>
+      <p:sp>
+        <p:nvSpPr>
+          <p:cNvPr id="8" name="文本框 7"/>
+          <p:cNvSpPr txBox="1"/>
+          <p:nvPr/>
+        </p:nvSpPr>
+        <p:spPr>
+          <a:xfrm>
+            <a:off x="3429635" y="3367405"/>
+            <a:ext cx="1222375" cy="368300"/>
+          </a:xfrm>
+          <a:prstGeom prst="rect">
+            <a:avLst/>
+          </a:prstGeom>
+          <a:noFill/>
+        </p:spPr>
+        <p:txBody>
+          <a:bodyPr wrap="square" rtlCol="0">
+            <a:spAutoFit/>
+          </a:bodyPr>
+          <a:p>
+            <a:r>
+              <a:rPr lang="zh-CN" altLang="en-US" b="1"/>
+              <a:t>接入卫星</a:t>
+            </a:r>
+            <a:endParaRPr lang="zh-CN" altLang="en-US" b="1"/>
+          </a:p>
+        </p:txBody>
+      </p:sp>
+      <p:sp>
+        <p:nvSpPr>
+          <p:cNvPr id="9" name="文本框 8"/>
+          <p:cNvSpPr txBox="1"/>
+          <p:nvPr/>
+        </p:nvSpPr>
+        <p:spPr>
+          <a:xfrm>
+            <a:off x="5602605" y="3317240"/>
+            <a:ext cx="1222375" cy="368300"/>
+          </a:xfrm>
+          <a:prstGeom prst="rect">
+            <a:avLst/>
+          </a:prstGeom>
+          <a:noFill/>
+        </p:spPr>
+        <p:txBody>
+          <a:bodyPr wrap="square" rtlCol="0">
+            <a:spAutoFit/>
+          </a:bodyPr>
+          <a:p>
+            <a:r>
+              <a:rPr lang="zh-CN" altLang="en-US" b="1"/>
+              <a:t>中继卫星</a:t>
+            </a:r>
+            <a:endParaRPr lang="zh-CN" altLang="en-US" b="1"/>
+          </a:p>
+        </p:txBody>
+      </p:sp>
+      <p:sp>
+        <p:nvSpPr>
+          <p:cNvPr id="10" name="矩形 9"/>
+          <p:cNvSpPr/>
+          <p:nvPr/>
+        </p:nvSpPr>
+        <p:spPr>
+          <a:xfrm>
+            <a:off x="7654290" y="2008505"/>
+            <a:ext cx="1226185" cy="4541520"/>
+          </a:xfrm>
+          <a:prstGeom prst="rect">
+            <a:avLst/>
+          </a:prstGeom>
+          <a:solidFill>
+            <a:schemeClr val="accent1">
+              <a:lumMod val="20000"/>
+              <a:lumOff val="80000"/>
+            </a:schemeClr>
+          </a:solidFill>
+          <a:ln w="12700" cmpd="sng">
+            <a:solidFill>
+              <a:schemeClr val="accent1">
+                <a:shade val="50000"/>
+              </a:schemeClr>
+            </a:solidFill>
+            <a:prstDash val="solid"/>
+          </a:ln>
+        </p:spPr>
+        <p:style>
+          <a:lnRef idx="2">
+            <a:schemeClr val="accent1">
+              <a:lumMod val="75000"/>
+            </a:schemeClr>
+          </a:lnRef>
+          <a:fillRef idx="1">
+            <a:schemeClr val="accent1"/>
+          </a:fillRef>
+          <a:effectRef idx="0">
+            <a:srgbClr val="FFFFFF"/>
+          </a:effectRef>
+          <a:fontRef idx="minor">
+            <a:schemeClr val="lt1"/>
+          </a:fontRef>
+        </p:style>
+        <p:txBody>
+          <a:bodyPr rtlCol="0" anchor="ctr"/>
+          <a:p>
+            <a:pPr algn="ctr"/>
+            <a:endParaRPr lang="zh-CN" altLang="en-US"/>
+          </a:p>
+        </p:txBody>
+      </p:sp>
+      <p:sp>
+        <p:nvSpPr>
+          <p:cNvPr id="12" name="文本框 11"/>
+          <p:cNvSpPr txBox="1"/>
+          <p:nvPr/>
+        </p:nvSpPr>
+        <p:spPr>
+          <a:xfrm>
+            <a:off x="7554595" y="2008505"/>
+            <a:ext cx="1390015" cy="645160"/>
+          </a:xfrm>
+          <a:prstGeom prst="rect">
+            <a:avLst/>
+          </a:prstGeom>
+          <a:noFill/>
+        </p:spPr>
+        <p:txBody>
+          <a:bodyPr wrap="square" rtlCol="0">
+            <a:spAutoFit/>
+          </a:bodyPr>
+          <a:p>
+            <a:pPr algn="ctr"/>
+            <a:r>
+              <a:rPr lang="zh-CN" altLang="en-US" b="1"/>
+              <a:t>地面网关</a:t>
+            </a:r>
+            <a:r>
+              <a:rPr lang="en-US" altLang="zh-CN" b="1"/>
+              <a:t>/</a:t>
+            </a:r>
+            <a:r>
+              <a:rPr lang="zh-CN" altLang="en-US" b="1"/>
+              <a:t>互联网端点</a:t>
+            </a:r>
+            <a:endParaRPr lang="zh-CN" altLang="en-US" b="1"/>
+          </a:p>
+        </p:txBody>
+      </p:sp>
+      <p:sp>
+        <p:nvSpPr>
+          <p:cNvPr id="15" name="文本框 14"/>
+          <p:cNvSpPr txBox="1"/>
+          <p:nvPr/>
+        </p:nvSpPr>
+        <p:spPr>
+          <a:xfrm>
+            <a:off x="3638550" y="3071495"/>
+            <a:ext cx="1013460" cy="245110"/>
+          </a:xfrm>
+          <a:prstGeom prst="rect">
+            <a:avLst/>
+          </a:prstGeom>
+          <a:noFill/>
+        </p:spPr>
+        <p:txBody>
+          <a:bodyPr wrap="square" rtlCol="0">
+            <a:spAutoFit/>
+          </a:bodyPr>
+          <a:p>
+            <a:r>
+              <a:rPr lang="zh-CN" altLang="en-US" sz="1000" b="1"/>
+              <a:t>候选卫星集合</a:t>
+            </a:r>
+            <a:endParaRPr lang="zh-CN" altLang="en-US" sz="1000" b="1"/>
+          </a:p>
+        </p:txBody>
+      </p:sp>
+      <p:sp>
+        <p:nvSpPr>
+          <p:cNvPr id="18" name="圆角矩形 17"/>
+          <p:cNvSpPr/>
+          <p:nvPr/>
+        </p:nvSpPr>
+        <p:spPr>
+          <a:xfrm>
+            <a:off x="1245870" y="2653665"/>
+            <a:ext cx="952500" cy="713740"/>
+          </a:xfrm>
+          <a:prstGeom prst="roundRect">
+            <a:avLst/>
+          </a:prstGeom>
+        </p:spPr>
+        <p:style>
+          <a:lnRef idx="2">
+            <a:schemeClr val="accent1">
+              <a:lumMod val="75000"/>
+            </a:schemeClr>
+          </a:lnRef>
+          <a:fillRef idx="1">
+            <a:schemeClr val="accent1"/>
+          </a:fillRef>
+          <a:effectRef idx="0">
+            <a:srgbClr val="FFFFFF"/>
+          </a:effectRef>
+          <a:fontRef idx="minor">
+            <a:schemeClr val="lt1"/>
+          </a:fontRef>
+        </p:style>
+        <p:txBody>
+          <a:bodyPr rtlCol="0" anchor="ctr"/>
+          <a:p>
+            <a:pPr algn="ctr"/>
+            <a:r>
+              <a:rPr lang="zh-CN" altLang="en-US" sz="1500"/>
+              <a:t>应用层</a:t>
+            </a:r>
+            <a:br>
+              <a:rPr lang="zh-CN" altLang="en-US" sz="1500"/>
+            </a:br>
+            <a:r>
+              <a:rPr lang="zh-CN" altLang="en-US" sz="1500"/>
+              <a:t>任务</a:t>
+            </a:r>
+            <a:endParaRPr lang="zh-CN" altLang="en-US" sz="1500"/>
+          </a:p>
+          <a:p>
+            <a:pPr algn="ctr"/>
+            <a:r>
+              <a:rPr lang="zh-CN" altLang="en-US" sz="1500"/>
+              <a:t>编码</a:t>
+            </a:r>
+            <a:endParaRPr lang="zh-CN" altLang="en-US" sz="1500"/>
+          </a:p>
+        </p:txBody>
+      </p:sp>
+      <p:sp>
+        <p:nvSpPr>
+          <p:cNvPr id="19" name="矩形 18"/>
+          <p:cNvSpPr/>
+          <p:nvPr/>
+        </p:nvSpPr>
+        <p:spPr>
+          <a:xfrm>
+            <a:off x="857250" y="1762760"/>
+            <a:ext cx="8298815" cy="5017135"/>
+          </a:xfrm>
+          <a:prstGeom prst="rect">
+            <a:avLst/>
+          </a:prstGeom>
+          <a:noFill/>
+          <a:ln>
+            <a:solidFill>
+              <a:schemeClr val="bg1">
+                <a:lumMod val="50000"/>
+              </a:schemeClr>
+            </a:solidFill>
+            <a:prstDash val="dash"/>
+          </a:ln>
+        </p:spPr>
+        <p:style>
+          <a:lnRef idx="2">
+            <a:schemeClr val="accent1">
+              <a:lumMod val="75000"/>
+            </a:schemeClr>
+          </a:lnRef>
+          <a:fillRef idx="1">
+            <a:schemeClr val="accent1"/>
+          </a:fillRef>
+          <a:effectRef idx="0">
+            <a:srgbClr val="FFFFFF"/>
+          </a:effectRef>
+          <a:fontRef idx="minor">
+            <a:schemeClr val="lt1"/>
+          </a:fontRef>
+        </p:style>
+        <p:txBody>
+          <a:bodyPr rtlCol="0" anchor="ctr"/>
+          <a:p>
+            <a:pPr algn="ctr"/>
+            <a:endParaRPr lang="zh-CN" altLang="en-US"/>
+          </a:p>
+        </p:txBody>
+      </p:sp>
+      <p:sp>
+        <p:nvSpPr>
+          <p:cNvPr id="20" name="圆角矩形 19"/>
+          <p:cNvSpPr/>
+          <p:nvPr/>
+        </p:nvSpPr>
+        <p:spPr>
+          <a:xfrm>
+            <a:off x="857250" y="226695"/>
+            <a:ext cx="8299450" cy="1218565"/>
+          </a:xfrm>
+          <a:prstGeom prst="roundRect">
+            <a:avLst/>
+          </a:prstGeom>
+          <a:solidFill>
+            <a:schemeClr val="bg1">
+              <a:lumMod val="95000"/>
+            </a:schemeClr>
+          </a:solidFill>
+        </p:spPr>
+        <p:style>
+          <a:lnRef idx="2">
+            <a:schemeClr val="accent1">
+              <a:lumMod val="75000"/>
+            </a:schemeClr>
+          </a:lnRef>
+          <a:fillRef idx="1">
+            <a:schemeClr val="accent1"/>
+          </a:fillRef>
+          <a:effectRef idx="0">
+            <a:srgbClr val="FFFFFF"/>
+          </a:effectRef>
+          <a:fontRef idx="minor">
+            <a:schemeClr val="lt1"/>
+          </a:fontRef>
+        </p:style>
+        <p:txBody>
+          <a:bodyPr rtlCol="0" anchor="ctr"/>
+          <a:p>
+            <a:pPr algn="ctr"/>
+            <a:endParaRPr lang="zh-CN" altLang="en-US"/>
+          </a:p>
+        </p:txBody>
+      </p:sp>
+      <p:sp>
+        <p:nvSpPr>
+          <p:cNvPr id="21" name="文本框 20"/>
+          <p:cNvSpPr txBox="1"/>
+          <p:nvPr/>
+        </p:nvSpPr>
+        <p:spPr>
+          <a:xfrm>
+            <a:off x="3900805" y="226695"/>
+            <a:ext cx="2362200" cy="368300"/>
+          </a:xfrm>
+          <a:prstGeom prst="rect">
+            <a:avLst/>
+          </a:prstGeom>
+          <a:noFill/>
+        </p:spPr>
+        <p:txBody>
+          <a:bodyPr wrap="square" rtlCol="0">
+            <a:spAutoFit/>
+          </a:bodyPr>
+          <a:p>
+            <a:r>
+              <a:rPr lang="zh-CN" altLang="en-US" b="1"/>
+              <a:t>核心网卫星</a:t>
+            </a:r>
+            <a:r>
+              <a:rPr lang="zh-CN" altLang="en-US" b="1"/>
+              <a:t>运维功能</a:t>
+            </a:r>
+            <a:endParaRPr lang="zh-CN" altLang="en-US" b="1"/>
+          </a:p>
+        </p:txBody>
+      </p:sp>
+      <p:sp>
+        <p:nvSpPr>
+          <p:cNvPr id="22" name="下箭头 21"/>
+          <p:cNvSpPr/>
+          <p:nvPr/>
+        </p:nvSpPr>
+        <p:spPr>
+          <a:xfrm>
+            <a:off x="4440555" y="1481455"/>
+            <a:ext cx="756920" cy="245110"/>
+          </a:xfrm>
+          <a:prstGeom prst="downArrow">
+            <a:avLst/>
+          </a:prstGeom>
+        </p:spPr>
+        <p:style>
+          <a:lnRef idx="2">
+            <a:schemeClr val="accent1">
+              <a:lumMod val="75000"/>
+            </a:schemeClr>
+          </a:lnRef>
+          <a:fillRef idx="1">
+            <a:schemeClr val="accent1"/>
+          </a:fillRef>
+          <a:effectRef idx="0">
+            <a:srgbClr val="FFFFFF"/>
+          </a:effectRef>
+          <a:fontRef idx="minor">
+            <a:schemeClr val="lt1"/>
+          </a:fontRef>
+        </p:style>
+        <p:txBody>
+          <a:bodyPr rtlCol="0" anchor="ctr"/>
+          <a:p>
+            <a:pPr algn="ctr"/>
+            <a:endParaRPr lang="zh-CN" altLang="en-US"/>
+          </a:p>
+        </p:txBody>
+      </p:sp>
+      <p:sp>
+        <p:nvSpPr>
+          <p:cNvPr id="23" name="文本框 22"/>
+          <p:cNvSpPr txBox="1"/>
+          <p:nvPr/>
+        </p:nvSpPr>
+        <p:spPr>
+          <a:xfrm>
+            <a:off x="3383915" y="1394460"/>
+            <a:ext cx="1222375" cy="368300"/>
+          </a:xfrm>
+          <a:prstGeom prst="rect">
+            <a:avLst/>
+          </a:prstGeom>
+          <a:noFill/>
+        </p:spPr>
+        <p:txBody>
+          <a:bodyPr wrap="square" rtlCol="0">
+            <a:spAutoFit/>
+          </a:bodyPr>
+          <a:p>
+            <a:r>
+              <a:rPr lang="zh-CN" altLang="en-US"/>
+              <a:t>远程监控</a:t>
+            </a:r>
+            <a:endParaRPr lang="zh-CN" altLang="en-US"/>
+          </a:p>
+        </p:txBody>
+      </p:sp>
+      <p:sp>
+        <p:nvSpPr>
+          <p:cNvPr id="24" name="文本框 23"/>
+          <p:cNvSpPr txBox="1"/>
+          <p:nvPr/>
+        </p:nvSpPr>
+        <p:spPr>
+          <a:xfrm>
+            <a:off x="5246370" y="1390015"/>
+            <a:ext cx="1222375" cy="368300"/>
+          </a:xfrm>
+          <a:prstGeom prst="rect">
+            <a:avLst/>
+          </a:prstGeom>
+          <a:noFill/>
+        </p:spPr>
+        <p:txBody>
+          <a:bodyPr wrap="square" rtlCol="0">
+            <a:spAutoFit/>
+          </a:bodyPr>
+          <a:p>
+            <a:r>
+              <a:rPr lang="zh-CN" altLang="en-US"/>
+              <a:t>配置</a:t>
+            </a:r>
+            <a:endParaRPr lang="zh-CN" altLang="en-US"/>
+          </a:p>
+        </p:txBody>
+      </p:sp>
+      <p:sp>
+        <p:nvSpPr>
+          <p:cNvPr id="25" name="矩形 24"/>
+          <p:cNvSpPr/>
+          <p:nvPr/>
+        </p:nvSpPr>
+        <p:spPr>
+          <a:xfrm>
+            <a:off x="1109345" y="685165"/>
+            <a:ext cx="1684655" cy="447040"/>
+          </a:xfrm>
+          <a:prstGeom prst="rect">
+            <a:avLst/>
+          </a:prstGeom>
+          <a:solidFill>
+            <a:schemeClr val="accent5">
+              <a:lumMod val="20000"/>
+              <a:lumOff val="80000"/>
+            </a:schemeClr>
+          </a:solidFill>
+          <a:ln w="12700" cmpd="sng">
+            <a:solidFill>
+              <a:schemeClr val="accent1">
+                <a:shade val="50000"/>
+              </a:schemeClr>
+            </a:solidFill>
+            <a:prstDash val="solid"/>
+          </a:ln>
+        </p:spPr>
+        <p:style>
+          <a:lnRef idx="2">
+            <a:schemeClr val="accent1">
+              <a:lumMod val="75000"/>
+            </a:schemeClr>
+          </a:lnRef>
+          <a:fillRef idx="1">
+            <a:schemeClr val="accent1"/>
+          </a:fillRef>
+          <a:effectRef idx="0">
+            <a:srgbClr val="FFFFFF"/>
+          </a:effectRef>
+          <a:fontRef idx="minor">
+            <a:schemeClr val="lt1"/>
+          </a:fontRef>
+        </p:style>
+        <p:txBody>
+          <a:bodyPr rtlCol="0" anchor="ctr"/>
+          <a:p>
+            <a:pPr algn="ctr"/>
+            <a:r>
+              <a:rPr lang="zh-CN" altLang="en-US">
+                <a:solidFill>
+                  <a:schemeClr val="tx1"/>
+                </a:solidFill>
+              </a:rPr>
+              <a:t>用户注册</a:t>
+            </a:r>
+            <a:r>
+              <a:rPr lang="en-US" altLang="zh-CN">
+                <a:solidFill>
+                  <a:schemeClr val="tx1"/>
+                </a:solidFill>
+              </a:rPr>
+              <a:t>/</a:t>
+            </a:r>
+            <a:r>
+              <a:rPr lang="zh-CN" altLang="en-US">
+                <a:solidFill>
+                  <a:schemeClr val="tx1"/>
+                </a:solidFill>
+              </a:rPr>
+              <a:t>鉴权</a:t>
+            </a:r>
+            <a:endParaRPr lang="zh-CN" altLang="en-US">
+              <a:solidFill>
+                <a:schemeClr val="tx1"/>
+              </a:solidFill>
+            </a:endParaRPr>
+          </a:p>
+        </p:txBody>
+      </p:sp>
+      <p:sp>
+        <p:nvSpPr>
+          <p:cNvPr id="26" name="矩形 25"/>
+          <p:cNvSpPr/>
+          <p:nvPr/>
+        </p:nvSpPr>
+        <p:spPr>
+          <a:xfrm>
+            <a:off x="3067685" y="685165"/>
+            <a:ext cx="1684655" cy="447040"/>
+          </a:xfrm>
+          <a:prstGeom prst="rect">
+            <a:avLst/>
+          </a:prstGeom>
+          <a:solidFill>
+            <a:schemeClr val="accent5">
+              <a:lumMod val="20000"/>
+              <a:lumOff val="80000"/>
+            </a:schemeClr>
+          </a:solidFill>
+          <a:ln w="12700" cmpd="sng">
+            <a:solidFill>
+              <a:schemeClr val="accent1">
+                <a:shade val="50000"/>
+              </a:schemeClr>
+            </a:solidFill>
+            <a:prstDash val="solid"/>
+          </a:ln>
+        </p:spPr>
+        <p:style>
+          <a:lnRef idx="2">
+            <a:schemeClr val="accent1">
+              <a:lumMod val="75000"/>
+            </a:schemeClr>
+          </a:lnRef>
+          <a:fillRef idx="1">
+            <a:schemeClr val="accent1"/>
+          </a:fillRef>
+          <a:effectRef idx="0">
+            <a:srgbClr val="FFFFFF"/>
+          </a:effectRef>
+          <a:fontRef idx="minor">
+            <a:schemeClr val="lt1"/>
+          </a:fontRef>
+        </p:style>
+        <p:txBody>
+          <a:bodyPr rtlCol="0" anchor="ctr"/>
+          <a:p>
+            <a:pPr algn="ctr"/>
+            <a:r>
+              <a:rPr lang="zh-CN" altLang="en-US">
+                <a:solidFill>
+                  <a:schemeClr val="tx1"/>
+                </a:solidFill>
+              </a:rPr>
+              <a:t>会话</a:t>
+            </a:r>
+            <a:r>
+              <a:rPr lang="zh-CN" altLang="en-US">
+                <a:solidFill>
+                  <a:schemeClr val="tx1"/>
+                </a:solidFill>
+              </a:rPr>
+              <a:t>保持</a:t>
+            </a:r>
+            <a:endParaRPr lang="zh-CN" altLang="en-US">
+              <a:solidFill>
+                <a:schemeClr val="tx1"/>
+              </a:solidFill>
+            </a:endParaRPr>
+          </a:p>
+        </p:txBody>
+      </p:sp>
+      <p:sp>
+        <p:nvSpPr>
+          <p:cNvPr id="27" name="矩形 26"/>
+          <p:cNvSpPr/>
+          <p:nvPr/>
+        </p:nvSpPr>
+        <p:spPr>
+          <a:xfrm>
+            <a:off x="5144135" y="685165"/>
+            <a:ext cx="1684655" cy="447040"/>
+          </a:xfrm>
+          <a:prstGeom prst="rect">
+            <a:avLst/>
+          </a:prstGeom>
+          <a:solidFill>
+            <a:schemeClr val="accent5">
+              <a:lumMod val="20000"/>
+              <a:lumOff val="80000"/>
+            </a:schemeClr>
+          </a:solidFill>
+          <a:ln w="12700" cmpd="sng">
+            <a:solidFill>
+              <a:schemeClr val="accent1">
+                <a:shade val="50000"/>
+              </a:schemeClr>
+            </a:solidFill>
+            <a:prstDash val="solid"/>
+          </a:ln>
+        </p:spPr>
+        <p:style>
+          <a:lnRef idx="2">
+            <a:schemeClr val="accent1">
+              <a:lumMod val="75000"/>
+            </a:schemeClr>
+          </a:lnRef>
+          <a:fillRef idx="1">
+            <a:schemeClr val="accent1"/>
+          </a:fillRef>
+          <a:effectRef idx="0">
+            <a:srgbClr val="FFFFFF"/>
+          </a:effectRef>
+          <a:fontRef idx="minor">
+            <a:schemeClr val="lt1"/>
+          </a:fontRef>
+        </p:style>
+        <p:txBody>
+          <a:bodyPr rtlCol="0" anchor="ctr"/>
+          <a:p>
+            <a:pPr algn="ctr"/>
+            <a:r>
+              <a:rPr lang="zh-CN" altLang="en-US">
+                <a:solidFill>
+                  <a:schemeClr val="tx1"/>
+                </a:solidFill>
+              </a:rPr>
+              <a:t>星历</a:t>
+            </a:r>
+            <a:r>
+              <a:rPr lang="en-US" altLang="zh-CN">
+                <a:solidFill>
+                  <a:schemeClr val="tx1"/>
+                </a:solidFill>
+              </a:rPr>
+              <a:t>/</a:t>
+            </a:r>
+            <a:r>
+              <a:rPr lang="zh-CN" altLang="en-US">
+                <a:solidFill>
+                  <a:schemeClr val="tx1"/>
+                </a:solidFill>
+              </a:rPr>
+              <a:t>拓扑管理</a:t>
+            </a:r>
+            <a:endParaRPr lang="zh-CN" altLang="en-US">
+              <a:solidFill>
+                <a:schemeClr val="tx1"/>
+              </a:solidFill>
+            </a:endParaRPr>
+          </a:p>
+        </p:txBody>
+      </p:sp>
+      <p:sp>
+        <p:nvSpPr>
+          <p:cNvPr id="28" name="矩形 27"/>
+          <p:cNvSpPr/>
+          <p:nvPr/>
+        </p:nvSpPr>
+        <p:spPr>
+          <a:xfrm>
+            <a:off x="7220585" y="685165"/>
+            <a:ext cx="1684655" cy="447040"/>
+          </a:xfrm>
+          <a:prstGeom prst="rect">
+            <a:avLst/>
+          </a:prstGeom>
+          <a:solidFill>
+            <a:schemeClr val="accent5">
+              <a:lumMod val="20000"/>
+              <a:lumOff val="80000"/>
+            </a:schemeClr>
+          </a:solidFill>
+          <a:ln w="12700" cmpd="sng">
+            <a:solidFill>
+              <a:schemeClr val="accent1">
+                <a:shade val="50000"/>
+              </a:schemeClr>
+            </a:solidFill>
+            <a:prstDash val="solid"/>
+          </a:ln>
+        </p:spPr>
+        <p:style>
+          <a:lnRef idx="2">
+            <a:schemeClr val="accent1">
+              <a:lumMod val="75000"/>
+            </a:schemeClr>
+          </a:lnRef>
+          <a:fillRef idx="1">
+            <a:schemeClr val="accent1"/>
+          </a:fillRef>
+          <a:effectRef idx="0">
+            <a:srgbClr val="FFFFFF"/>
+          </a:effectRef>
+          <a:fontRef idx="minor">
+            <a:schemeClr val="lt1"/>
+          </a:fontRef>
+        </p:style>
+        <p:txBody>
+          <a:bodyPr rtlCol="0" anchor="ctr"/>
+          <a:p>
+            <a:pPr algn="ctr"/>
+            <a:r>
+              <a:rPr lang="zh-CN" altLang="en-US">
+                <a:solidFill>
+                  <a:schemeClr val="tx1"/>
+                </a:solidFill>
+              </a:rPr>
+              <a:t>遥测</a:t>
+            </a:r>
+            <a:r>
+              <a:rPr lang="en-US" altLang="zh-CN">
+                <a:solidFill>
+                  <a:schemeClr val="tx1"/>
+                </a:solidFill>
+              </a:rPr>
+              <a:t>/</a:t>
+            </a:r>
+            <a:r>
+              <a:rPr lang="zh-CN" altLang="en-US">
+                <a:solidFill>
+                  <a:schemeClr val="tx1"/>
+                </a:solidFill>
+              </a:rPr>
+              <a:t>遥控</a:t>
+            </a:r>
+            <a:endParaRPr lang="zh-CN" altLang="en-US">
+              <a:solidFill>
+                <a:schemeClr val="tx1"/>
+              </a:solidFill>
+            </a:endParaRPr>
+          </a:p>
+        </p:txBody>
+      </p:sp>
+      <p:sp>
+        <p:nvSpPr>
+          <p:cNvPr id="29" name="圆角矩形 28"/>
+          <p:cNvSpPr/>
+          <p:nvPr/>
+        </p:nvSpPr>
+        <p:spPr>
+          <a:xfrm>
+            <a:off x="7791450" y="2653665"/>
+            <a:ext cx="952500" cy="713740"/>
+          </a:xfrm>
+          <a:prstGeom prst="roundRect">
+            <a:avLst/>
+          </a:prstGeom>
+        </p:spPr>
+        <p:style>
+          <a:lnRef idx="2">
+            <a:schemeClr val="accent1">
+              <a:lumMod val="75000"/>
+            </a:schemeClr>
+          </a:lnRef>
+          <a:fillRef idx="1">
+            <a:schemeClr val="accent1"/>
+          </a:fillRef>
+          <a:effectRef idx="0">
+            <a:srgbClr val="FFFFFF"/>
+          </a:effectRef>
+          <a:fontRef idx="minor">
+            <a:schemeClr val="lt1"/>
+          </a:fontRef>
+        </p:style>
+        <p:txBody>
+          <a:bodyPr rtlCol="0" anchor="ctr"/>
+          <a:p>
+            <a:pPr algn="ctr"/>
+            <a:r>
+              <a:rPr lang="zh-CN" altLang="en-US" sz="1500"/>
+              <a:t>应用层</a:t>
+            </a:r>
+            <a:br>
+              <a:rPr lang="zh-CN" altLang="en-US" sz="1500"/>
+            </a:br>
+            <a:r>
+              <a:rPr lang="zh-CN" altLang="en-US" sz="1500"/>
+              <a:t>任务</a:t>
+            </a:r>
+            <a:endParaRPr lang="zh-CN" altLang="en-US" sz="1500"/>
+          </a:p>
+          <a:p>
+            <a:pPr algn="ctr"/>
+            <a:r>
+              <a:rPr lang="zh-CN" altLang="en-US" sz="1500"/>
+              <a:t>解码</a:t>
+            </a:r>
+            <a:endParaRPr lang="zh-CN" altLang="en-US" sz="1500"/>
+          </a:p>
+        </p:txBody>
+      </p:sp>
+      <p:cxnSp>
+        <p:nvCxnSpPr>
+          <p:cNvPr id="30" name="直接箭头连接符 29"/>
+          <p:cNvCxnSpPr/>
+          <p:nvPr/>
+        </p:nvCxnSpPr>
+        <p:spPr>
+          <a:xfrm>
+            <a:off x="2198370" y="3010535"/>
+            <a:ext cx="5593080" cy="0"/>
+          </a:xfrm>
+          <a:prstGeom prst="straightConnector1">
+            <a:avLst/>
+          </a:prstGeom>
+          <a:ln w="25400">
+            <a:solidFill>
+              <a:srgbClr val="C00000"/>
+            </a:solidFill>
+            <a:prstDash val="dashDot"/>
+            <a:headEnd type="arrow"/>
+            <a:tailEnd type="arrow"/>
+          </a:ln>
+        </p:spPr>
+        <p:style>
+          <a:lnRef idx="2">
+            <a:schemeClr val="accent1"/>
+          </a:lnRef>
+          <a:fillRef idx="0">
+            <a:srgbClr val="FFFFFF"/>
+          </a:fillRef>
+          <a:effectRef idx="0">
+            <a:srgbClr val="FFFFFF"/>
+          </a:effectRef>
+          <a:fontRef idx="minor">
+            <a:schemeClr val="tx1"/>
+          </a:fontRef>
+        </p:style>
+      </p:cxnSp>
+      <p:sp>
+        <p:nvSpPr>
+          <p:cNvPr id="31" name="圆角矩形 30"/>
+          <p:cNvSpPr/>
+          <p:nvPr/>
+        </p:nvSpPr>
+        <p:spPr>
+          <a:xfrm>
+            <a:off x="1255395" y="4725670"/>
+            <a:ext cx="952500" cy="713740"/>
+          </a:xfrm>
+          <a:prstGeom prst="roundRect">
+            <a:avLst/>
+          </a:prstGeom>
+        </p:spPr>
+        <p:style>
+          <a:lnRef idx="2">
+            <a:schemeClr val="accent1">
+              <a:lumMod val="75000"/>
+            </a:schemeClr>
+          </a:lnRef>
+          <a:fillRef idx="1">
+            <a:schemeClr val="accent1"/>
+          </a:fillRef>
+          <a:effectRef idx="0">
+            <a:srgbClr val="FFFFFF"/>
+          </a:effectRef>
+          <a:fontRef idx="minor">
+            <a:schemeClr val="lt1"/>
+          </a:fontRef>
+        </p:style>
+        <p:txBody>
+          <a:bodyPr rtlCol="0" anchor="ctr"/>
+          <a:p>
+            <a:pPr algn="ctr"/>
+            <a:r>
+              <a:rPr lang="en-US" sz="1500"/>
+              <a:t>IP</a:t>
+            </a:r>
+            <a:r>
+              <a:rPr lang="zh-CN" altLang="en-US" sz="1500"/>
+              <a:t>传输</a:t>
+            </a:r>
+            <a:endParaRPr lang="zh-CN" altLang="en-US" sz="1500"/>
+          </a:p>
+        </p:txBody>
+      </p:sp>
+      <p:sp>
+        <p:nvSpPr>
+          <p:cNvPr id="32" name="圆角矩形 31"/>
+          <p:cNvSpPr/>
+          <p:nvPr/>
+        </p:nvSpPr>
+        <p:spPr>
+          <a:xfrm>
+            <a:off x="3497580" y="4725670"/>
+            <a:ext cx="952500" cy="713740"/>
+          </a:xfrm>
+          <a:prstGeom prst="roundRect">
+            <a:avLst/>
+          </a:prstGeom>
+        </p:spPr>
+        <p:style>
+          <a:lnRef idx="2">
+            <a:schemeClr val="accent1">
+              <a:lumMod val="75000"/>
+            </a:schemeClr>
+          </a:lnRef>
+          <a:fillRef idx="1">
+            <a:schemeClr val="accent1"/>
+          </a:fillRef>
+          <a:effectRef idx="0">
+            <a:srgbClr val="FFFFFF"/>
+          </a:effectRef>
+          <a:fontRef idx="minor">
+            <a:schemeClr val="lt1"/>
+          </a:fontRef>
+        </p:style>
+        <p:txBody>
+          <a:bodyPr rtlCol="0" anchor="ctr"/>
+          <a:p>
+            <a:pPr algn="ctr"/>
+            <a:r>
+              <a:rPr lang="en-US" altLang="zh-CN" sz="1500"/>
+              <a:t>IP</a:t>
+            </a:r>
+            <a:r>
+              <a:rPr lang="zh-CN" altLang="en-US" sz="1500"/>
+              <a:t>路由</a:t>
+            </a:r>
+            <a:endParaRPr lang="zh-CN" altLang="en-US" sz="1500"/>
+          </a:p>
+          <a:p>
+            <a:pPr algn="ctr"/>
+            <a:r>
+              <a:rPr lang="zh-CN" altLang="en-US" sz="1500"/>
+              <a:t>转发</a:t>
+            </a:r>
+            <a:endParaRPr lang="zh-CN" altLang="en-US" sz="1500"/>
+          </a:p>
+        </p:txBody>
+      </p:sp>
+      <p:sp>
+        <p:nvSpPr>
+          <p:cNvPr id="34" name="圆角矩形 33"/>
+          <p:cNvSpPr/>
+          <p:nvPr/>
+        </p:nvSpPr>
+        <p:spPr>
+          <a:xfrm>
+            <a:off x="5730240" y="4725670"/>
+            <a:ext cx="952500" cy="713740"/>
+          </a:xfrm>
+          <a:prstGeom prst="roundRect">
+            <a:avLst/>
+          </a:prstGeom>
+        </p:spPr>
+        <p:style>
+          <a:lnRef idx="2">
+            <a:schemeClr val="accent1">
+              <a:lumMod val="75000"/>
+            </a:schemeClr>
+          </a:lnRef>
+          <a:fillRef idx="1">
+            <a:schemeClr val="accent1"/>
+          </a:fillRef>
+          <a:effectRef idx="0">
+            <a:srgbClr val="FFFFFF"/>
+          </a:effectRef>
+          <a:fontRef idx="minor">
+            <a:schemeClr val="lt1"/>
+          </a:fontRef>
+        </p:style>
+        <p:txBody>
+          <a:bodyPr rtlCol="0" anchor="ctr"/>
+          <a:p>
+            <a:pPr algn="ctr"/>
+            <a:r>
+              <a:rPr lang="en-US" altLang="zh-CN" sz="1500"/>
+              <a:t>IP</a:t>
+            </a:r>
+            <a:r>
+              <a:rPr lang="zh-CN" altLang="en-US" sz="1500"/>
+              <a:t>路由</a:t>
+            </a:r>
+            <a:endParaRPr lang="zh-CN" altLang="en-US" sz="1500"/>
+          </a:p>
+          <a:p>
+            <a:pPr algn="ctr"/>
+            <a:r>
+              <a:rPr lang="zh-CN" altLang="en-US" sz="1500"/>
+              <a:t>转发</a:t>
+            </a:r>
+            <a:endParaRPr lang="zh-CN" altLang="en-US" sz="1500"/>
+          </a:p>
+        </p:txBody>
+      </p:sp>
+      <p:sp>
+        <p:nvSpPr>
+          <p:cNvPr id="35" name="圆角矩形 34"/>
+          <p:cNvSpPr/>
+          <p:nvPr/>
+        </p:nvSpPr>
+        <p:spPr>
+          <a:xfrm>
+            <a:off x="1255395" y="5660390"/>
+            <a:ext cx="952500" cy="713740"/>
+          </a:xfrm>
+          <a:prstGeom prst="roundRect">
+            <a:avLst/>
+          </a:prstGeom>
+        </p:spPr>
+        <p:style>
+          <a:lnRef idx="2">
+            <a:schemeClr val="accent1">
+              <a:lumMod val="75000"/>
+            </a:schemeClr>
+          </a:lnRef>
+          <a:fillRef idx="1">
+            <a:schemeClr val="accent1"/>
+          </a:fillRef>
+          <a:effectRef idx="0">
+            <a:srgbClr val="FFFFFF"/>
+          </a:effectRef>
+          <a:fontRef idx="minor">
+            <a:schemeClr val="lt1"/>
+          </a:fontRef>
+        </p:style>
+        <p:txBody>
+          <a:bodyPr rtlCol="0" anchor="ctr"/>
+          <a:p>
+            <a:pPr algn="ctr"/>
+            <a:r>
+              <a:rPr lang="zh-CN" altLang="en-US" sz="1500"/>
+              <a:t>接入</a:t>
+            </a:r>
+            <a:r>
+              <a:rPr lang="en-US" altLang="zh-CN" sz="1500"/>
+              <a:t>MAC</a:t>
+            </a:r>
+            <a:endParaRPr lang="en-US" altLang="zh-CN" sz="1500"/>
+          </a:p>
+          <a:p>
+            <a:pPr algn="ctr"/>
+            <a:r>
+              <a:rPr lang="en-US" altLang="zh-CN" sz="1500"/>
+              <a:t>/PHY</a:t>
+            </a:r>
+            <a:endParaRPr lang="en-US" altLang="zh-CN" sz="1500"/>
+          </a:p>
+        </p:txBody>
+      </p:sp>
+      <p:sp>
+        <p:nvSpPr>
+          <p:cNvPr id="36" name="圆角矩形 35"/>
+          <p:cNvSpPr/>
+          <p:nvPr/>
+        </p:nvSpPr>
+        <p:spPr>
+          <a:xfrm>
+            <a:off x="3497580" y="3807460"/>
+            <a:ext cx="952500" cy="713740"/>
+          </a:xfrm>
+          <a:prstGeom prst="roundRect">
+            <a:avLst/>
+          </a:prstGeom>
+        </p:spPr>
+        <p:style>
+          <a:lnRef idx="2">
+            <a:schemeClr val="accent1">
+              <a:lumMod val="75000"/>
+            </a:schemeClr>
+          </a:lnRef>
+          <a:fillRef idx="1">
+            <a:schemeClr val="accent1"/>
+          </a:fillRef>
+          <a:effectRef idx="0">
+            <a:srgbClr val="FFFFFF"/>
+          </a:effectRef>
+          <a:fontRef idx="minor">
+            <a:schemeClr val="lt1"/>
+          </a:fontRef>
+        </p:style>
+        <p:txBody>
+          <a:bodyPr rtlCol="0" anchor="ctr"/>
+          <a:p>
+            <a:pPr algn="ctr"/>
+            <a:r>
+              <a:rPr lang="zh-CN" altLang="en-US" sz="1500"/>
+              <a:t>邻域</a:t>
+            </a:r>
+            <a:endParaRPr lang="zh-CN" altLang="en-US" sz="1500"/>
+          </a:p>
+          <a:p>
+            <a:pPr algn="ctr"/>
+            <a:r>
+              <a:rPr lang="zh-CN" altLang="en-US" sz="1500"/>
+              <a:t>感知</a:t>
+            </a:r>
+            <a:endParaRPr lang="zh-CN" altLang="en-US" sz="1500"/>
+          </a:p>
+        </p:txBody>
+      </p:sp>
+      <p:sp>
+        <p:nvSpPr>
+          <p:cNvPr id="37" name="圆角矩形 36"/>
+          <p:cNvSpPr/>
+          <p:nvPr/>
+        </p:nvSpPr>
+        <p:spPr>
+          <a:xfrm>
+            <a:off x="5730240" y="3807460"/>
+            <a:ext cx="952500" cy="713740"/>
+          </a:xfrm>
+          <a:prstGeom prst="roundRect">
+            <a:avLst/>
+          </a:prstGeom>
+        </p:spPr>
+        <p:style>
+          <a:lnRef idx="2">
+            <a:schemeClr val="accent1">
+              <a:lumMod val="75000"/>
+            </a:schemeClr>
+          </a:lnRef>
+          <a:fillRef idx="1">
+            <a:schemeClr val="accent1"/>
+          </a:fillRef>
+          <a:effectRef idx="0">
+            <a:srgbClr val="FFFFFF"/>
+          </a:effectRef>
+          <a:fontRef idx="minor">
+            <a:schemeClr val="lt1"/>
+          </a:fontRef>
+        </p:style>
+        <p:txBody>
+          <a:bodyPr rtlCol="0" anchor="ctr"/>
+          <a:p>
+            <a:pPr algn="ctr"/>
+            <a:r>
+              <a:rPr lang="zh-CN" altLang="en-US" sz="1500"/>
+              <a:t>邻域</a:t>
+            </a:r>
+            <a:endParaRPr lang="zh-CN" altLang="en-US" sz="1500"/>
+          </a:p>
+          <a:p>
+            <a:pPr algn="ctr"/>
+            <a:r>
+              <a:rPr lang="zh-CN" altLang="en-US" sz="1500"/>
+              <a:t>感知</a:t>
+            </a:r>
+            <a:endParaRPr lang="zh-CN" altLang="en-US" sz="1500"/>
+          </a:p>
+        </p:txBody>
+      </p:sp>
+      <p:cxnSp>
+        <p:nvCxnSpPr>
+          <p:cNvPr id="38" name="直接箭头连接符 37"/>
+          <p:cNvCxnSpPr/>
+          <p:nvPr/>
+        </p:nvCxnSpPr>
+        <p:spPr>
+          <a:xfrm>
+            <a:off x="4440555" y="4168775"/>
+            <a:ext cx="1283335" cy="0"/>
+          </a:xfrm>
+          <a:prstGeom prst="straightConnector1">
+            <a:avLst/>
+          </a:prstGeom>
+          <a:ln w="25400">
+            <a:solidFill>
+              <a:schemeClr val="accent5">
+                <a:lumMod val="50000"/>
+              </a:schemeClr>
+            </a:solidFill>
+            <a:prstDash val="dashDot"/>
+            <a:headEnd type="arrow"/>
+            <a:tailEnd type="arrow"/>
+          </a:ln>
+        </p:spPr>
+        <p:style>
+          <a:lnRef idx="2">
+            <a:schemeClr val="accent1"/>
+          </a:lnRef>
+          <a:fillRef idx="0">
+            <a:srgbClr val="FFFFFF"/>
+          </a:fillRef>
+          <a:effectRef idx="0">
+            <a:srgbClr val="FFFFFF"/>
+          </a:effectRef>
+          <a:fontRef idx="minor">
+            <a:schemeClr val="tx1"/>
+          </a:fontRef>
+        </p:style>
+      </p:cxnSp>
+      <p:cxnSp>
+        <p:nvCxnSpPr>
+          <p:cNvPr id="39" name="直接连接符 38"/>
+          <p:cNvCxnSpPr>
+            <a:stCxn id="4" idx="2"/>
+          </p:cNvCxnSpPr>
+          <p:nvPr/>
+        </p:nvCxnSpPr>
+        <p:spPr>
+          <a:xfrm>
+            <a:off x="1722755" y="6550025"/>
+            <a:ext cx="0" cy="158750"/>
+          </a:xfrm>
+          <a:prstGeom prst="line">
+            <a:avLst/>
+          </a:prstGeom>
+          <a:ln w="19050">
+            <a:solidFill>
+              <a:schemeClr val="tx1"/>
+            </a:solidFill>
+          </a:ln>
+        </p:spPr>
+        <p:style>
+          <a:lnRef idx="2">
+            <a:schemeClr val="accent1"/>
+          </a:lnRef>
+          <a:fillRef idx="0">
+            <a:srgbClr val="FFFFFF"/>
+          </a:fillRef>
+          <a:effectRef idx="0">
+            <a:srgbClr val="FFFFFF"/>
+          </a:effectRef>
+          <a:fontRef idx="minor">
+            <a:schemeClr val="tx1"/>
+          </a:fontRef>
+        </p:style>
+      </p:cxnSp>
+      <p:cxnSp>
+        <p:nvCxnSpPr>
+          <p:cNvPr id="40" name="直接连接符 39"/>
+          <p:cNvCxnSpPr/>
+          <p:nvPr/>
+        </p:nvCxnSpPr>
+        <p:spPr>
+          <a:xfrm>
+            <a:off x="1729740" y="6701155"/>
+            <a:ext cx="2292985" cy="0"/>
+          </a:xfrm>
+          <a:prstGeom prst="line">
+            <a:avLst/>
+          </a:prstGeom>
+          <a:ln w="19050">
+            <a:solidFill>
+              <a:schemeClr val="tx1"/>
+            </a:solidFill>
+          </a:ln>
+        </p:spPr>
+        <p:style>
+          <a:lnRef idx="2">
+            <a:schemeClr val="accent1"/>
+          </a:lnRef>
+          <a:fillRef idx="0">
+            <a:srgbClr val="FFFFFF"/>
+          </a:fillRef>
+          <a:effectRef idx="0">
+            <a:srgbClr val="FFFFFF"/>
+          </a:effectRef>
+          <a:fontRef idx="minor">
+            <a:schemeClr val="tx1"/>
+          </a:fontRef>
+        </p:style>
+      </p:cxnSp>
+      <p:cxnSp>
+        <p:nvCxnSpPr>
+          <p:cNvPr id="41" name="直接连接符 40"/>
+          <p:cNvCxnSpPr/>
+          <p:nvPr/>
+        </p:nvCxnSpPr>
+        <p:spPr>
+          <a:xfrm>
+            <a:off x="4022725" y="6546215"/>
+            <a:ext cx="0" cy="158750"/>
+          </a:xfrm>
+          <a:prstGeom prst="line">
+            <a:avLst/>
+          </a:prstGeom>
+          <a:ln w="19050">
+            <a:solidFill>
+              <a:schemeClr val="tx1"/>
+            </a:solidFill>
+          </a:ln>
+        </p:spPr>
+        <p:style>
+          <a:lnRef idx="2">
+            <a:schemeClr val="accent1"/>
+          </a:lnRef>
+          <a:fillRef idx="0">
+            <a:srgbClr val="FFFFFF"/>
+          </a:fillRef>
+          <a:effectRef idx="0">
+            <a:srgbClr val="FFFFFF"/>
+          </a:effectRef>
+          <a:fontRef idx="minor">
+            <a:schemeClr val="tx1"/>
+          </a:fontRef>
+        </p:style>
+      </p:cxnSp>
+      <p:sp>
+        <p:nvSpPr>
+          <p:cNvPr id="42" name="文本框 41"/>
+          <p:cNvSpPr txBox="1"/>
+          <p:nvPr/>
+        </p:nvSpPr>
+        <p:spPr>
+          <a:xfrm>
+            <a:off x="2411095" y="6332855"/>
+            <a:ext cx="868680" cy="368300"/>
+          </a:xfrm>
+          <a:prstGeom prst="rect">
+            <a:avLst/>
+          </a:prstGeom>
+          <a:noFill/>
+        </p:spPr>
+        <p:txBody>
+          <a:bodyPr wrap="square" rtlCol="0">
+            <a:spAutoFit/>
+          </a:bodyPr>
+          <a:p>
+            <a:r>
+              <a:rPr lang="zh-CN" altLang="en-US"/>
+              <a:t>服务</a:t>
+            </a:r>
+            <a:r>
+              <a:rPr lang="zh-CN" altLang="en-US"/>
+              <a:t>链</a:t>
+            </a:r>
+            <a:endParaRPr lang="zh-CN" altLang="en-US"/>
+          </a:p>
+        </p:txBody>
+      </p:sp>
+      <p:cxnSp>
+        <p:nvCxnSpPr>
+          <p:cNvPr id="43" name="直接连接符 42"/>
+          <p:cNvCxnSpPr/>
+          <p:nvPr/>
+        </p:nvCxnSpPr>
+        <p:spPr>
+          <a:xfrm>
+            <a:off x="4440555" y="6555740"/>
+            <a:ext cx="0" cy="158750"/>
+          </a:xfrm>
+          <a:prstGeom prst="line">
+            <a:avLst/>
+          </a:prstGeom>
+          <a:ln w="19050">
+            <a:solidFill>
+              <a:schemeClr val="tx1"/>
+            </a:solidFill>
+          </a:ln>
+        </p:spPr>
+        <p:style>
+          <a:lnRef idx="2">
+            <a:schemeClr val="accent1"/>
+          </a:lnRef>
+          <a:fillRef idx="0">
+            <a:srgbClr val="FFFFFF"/>
+          </a:fillRef>
+          <a:effectRef idx="0">
+            <a:srgbClr val="FFFFFF"/>
+          </a:effectRef>
+          <a:fontRef idx="minor">
+            <a:schemeClr val="tx1"/>
+          </a:fontRef>
+        </p:style>
+      </p:cxnSp>
+      <p:cxnSp>
+        <p:nvCxnSpPr>
+          <p:cNvPr id="44" name="直接连接符 43"/>
+          <p:cNvCxnSpPr/>
+          <p:nvPr/>
+        </p:nvCxnSpPr>
+        <p:spPr>
+          <a:xfrm>
+            <a:off x="4440555" y="6720205"/>
+            <a:ext cx="1908000" cy="0"/>
+          </a:xfrm>
+          <a:prstGeom prst="line">
+            <a:avLst/>
+          </a:prstGeom>
+          <a:ln w="19050">
+            <a:solidFill>
+              <a:schemeClr val="tx1"/>
+            </a:solidFill>
+          </a:ln>
+        </p:spPr>
+        <p:style>
+          <a:lnRef idx="2">
+            <a:schemeClr val="accent1"/>
+          </a:lnRef>
+          <a:fillRef idx="0">
+            <a:srgbClr val="FFFFFF"/>
+          </a:fillRef>
+          <a:effectRef idx="0">
+            <a:srgbClr val="FFFFFF"/>
+          </a:effectRef>
+          <a:fontRef idx="minor">
+            <a:schemeClr val="tx1"/>
+          </a:fontRef>
+        </p:style>
+      </p:cxnSp>
+      <p:cxnSp>
+        <p:nvCxnSpPr>
+          <p:cNvPr id="45" name="直接连接符 44"/>
+          <p:cNvCxnSpPr/>
+          <p:nvPr/>
+        </p:nvCxnSpPr>
+        <p:spPr>
+          <a:xfrm>
+            <a:off x="6357620" y="6562725"/>
+            <a:ext cx="0" cy="158750"/>
+          </a:xfrm>
+          <a:prstGeom prst="line">
+            <a:avLst/>
+          </a:prstGeom>
+          <a:ln w="19050">
+            <a:solidFill>
+              <a:schemeClr val="tx1"/>
+            </a:solidFill>
+          </a:ln>
+        </p:spPr>
+        <p:style>
+          <a:lnRef idx="2">
+            <a:schemeClr val="accent1"/>
+          </a:lnRef>
+          <a:fillRef idx="0">
+            <a:srgbClr val="FFFFFF"/>
+          </a:fillRef>
+          <a:effectRef idx="0">
+            <a:srgbClr val="FFFFFF"/>
+          </a:effectRef>
+          <a:fontRef idx="minor">
+            <a:schemeClr val="tx1"/>
+          </a:fontRef>
+        </p:style>
+      </p:cxnSp>
+      <p:sp>
+        <p:nvSpPr>
+          <p:cNvPr id="46" name="文本框 45"/>
+          <p:cNvSpPr txBox="1"/>
+          <p:nvPr/>
+        </p:nvSpPr>
+        <p:spPr>
+          <a:xfrm>
+            <a:off x="4755515" y="6374130"/>
+            <a:ext cx="868680" cy="368300"/>
+          </a:xfrm>
+          <a:prstGeom prst="rect">
+            <a:avLst/>
+          </a:prstGeom>
+          <a:noFill/>
+        </p:spPr>
+        <p:txBody>
+          <a:bodyPr wrap="square" rtlCol="0">
+            <a:spAutoFit/>
+          </a:bodyPr>
+          <a:p>
+            <a:r>
+              <a:rPr lang="zh-CN" altLang="en-US"/>
+              <a:t>星间链</a:t>
+            </a:r>
+            <a:endParaRPr lang="zh-CN" altLang="en-US"/>
+          </a:p>
+        </p:txBody>
+      </p:sp>
+      <p:cxnSp>
+        <p:nvCxnSpPr>
+          <p:cNvPr id="47" name="直接连接符 46"/>
+          <p:cNvCxnSpPr/>
+          <p:nvPr/>
+        </p:nvCxnSpPr>
+        <p:spPr>
+          <a:xfrm>
+            <a:off x="6682740" y="6555740"/>
+            <a:ext cx="0" cy="158750"/>
+          </a:xfrm>
+          <a:prstGeom prst="line">
+            <a:avLst/>
+          </a:prstGeom>
+          <a:ln w="19050">
+            <a:solidFill>
+              <a:schemeClr val="tx1"/>
+            </a:solidFill>
+          </a:ln>
+        </p:spPr>
+        <p:style>
+          <a:lnRef idx="2">
+            <a:schemeClr val="accent1"/>
+          </a:lnRef>
+          <a:fillRef idx="0">
+            <a:srgbClr val="FFFFFF"/>
+          </a:fillRef>
+          <a:effectRef idx="0">
+            <a:srgbClr val="FFFFFF"/>
+          </a:effectRef>
+          <a:fontRef idx="minor">
+            <a:schemeClr val="tx1"/>
+          </a:fontRef>
+        </p:style>
+      </p:cxnSp>
+      <p:cxnSp>
+        <p:nvCxnSpPr>
+          <p:cNvPr id="48" name="直接连接符 47"/>
+          <p:cNvCxnSpPr/>
+          <p:nvPr/>
+        </p:nvCxnSpPr>
+        <p:spPr>
+          <a:xfrm flipV="1">
+            <a:off x="6668770" y="6722745"/>
+            <a:ext cx="1680210" cy="0"/>
+          </a:xfrm>
+          <a:prstGeom prst="line">
+            <a:avLst/>
+          </a:prstGeom>
+          <a:ln w="19050">
+            <a:solidFill>
+              <a:schemeClr val="tx1"/>
+            </a:solidFill>
+          </a:ln>
+        </p:spPr>
+        <p:style>
+          <a:lnRef idx="2">
+            <a:schemeClr val="accent1"/>
+          </a:lnRef>
+          <a:fillRef idx="0">
+            <a:srgbClr val="FFFFFF"/>
+          </a:fillRef>
+          <a:effectRef idx="0">
+            <a:srgbClr val="FFFFFF"/>
+          </a:effectRef>
+          <a:fontRef idx="minor">
+            <a:schemeClr val="tx1"/>
+          </a:fontRef>
+        </p:style>
+      </p:cxnSp>
+      <p:cxnSp>
+        <p:nvCxnSpPr>
+          <p:cNvPr id="49" name="直接连接符 48"/>
+          <p:cNvCxnSpPr/>
+          <p:nvPr/>
+        </p:nvCxnSpPr>
+        <p:spPr>
+          <a:xfrm>
+            <a:off x="8345805" y="6555740"/>
+            <a:ext cx="0" cy="158750"/>
+          </a:xfrm>
+          <a:prstGeom prst="line">
+            <a:avLst/>
+          </a:prstGeom>
+          <a:ln w="19050">
+            <a:solidFill>
+              <a:schemeClr val="tx1"/>
+            </a:solidFill>
+          </a:ln>
+        </p:spPr>
+        <p:style>
+          <a:lnRef idx="2">
+            <a:schemeClr val="accent1"/>
+          </a:lnRef>
+          <a:fillRef idx="0">
+            <a:srgbClr val="FFFFFF"/>
+          </a:fillRef>
+          <a:effectRef idx="0">
+            <a:srgbClr val="FFFFFF"/>
+          </a:effectRef>
+          <a:fontRef idx="minor">
+            <a:schemeClr val="tx1"/>
+          </a:fontRef>
+        </p:style>
+      </p:cxnSp>
+      <p:sp>
+        <p:nvSpPr>
+          <p:cNvPr id="50" name="文本框 49"/>
+          <p:cNvSpPr txBox="1"/>
+          <p:nvPr/>
+        </p:nvSpPr>
+        <p:spPr>
+          <a:xfrm>
+            <a:off x="6828790" y="6332855"/>
+            <a:ext cx="868680" cy="368300"/>
+          </a:xfrm>
+          <a:prstGeom prst="rect">
+            <a:avLst/>
+          </a:prstGeom>
+          <a:noFill/>
+        </p:spPr>
+        <p:txBody>
+          <a:bodyPr wrap="square" rtlCol="0">
+            <a:spAutoFit/>
+          </a:bodyPr>
+          <a:p>
+            <a:r>
+              <a:rPr lang="zh-CN" altLang="en-US"/>
+              <a:t>馈电链</a:t>
+            </a:r>
+            <a:endParaRPr lang="zh-CN" altLang="en-US"/>
+          </a:p>
+        </p:txBody>
+      </p:sp>
+      <p:sp>
+        <p:nvSpPr>
+          <p:cNvPr id="51" name="圆角矩形 50"/>
+          <p:cNvSpPr/>
+          <p:nvPr/>
+        </p:nvSpPr>
+        <p:spPr>
+          <a:xfrm>
+            <a:off x="3497580" y="5660390"/>
+            <a:ext cx="952500" cy="713740"/>
+          </a:xfrm>
+          <a:prstGeom prst="roundRect">
+            <a:avLst/>
+          </a:prstGeom>
+        </p:spPr>
+        <p:style>
+          <a:lnRef idx="2">
+            <a:schemeClr val="accent1">
+              <a:lumMod val="75000"/>
+            </a:schemeClr>
+          </a:lnRef>
+          <a:fillRef idx="1">
+            <a:schemeClr val="accent1"/>
+          </a:fillRef>
+          <a:effectRef idx="0">
+            <a:srgbClr val="FFFFFF"/>
+          </a:effectRef>
+          <a:fontRef idx="minor">
+            <a:schemeClr val="lt1"/>
+          </a:fontRef>
+        </p:style>
+        <p:txBody>
+          <a:bodyPr rtlCol="0" anchor="ctr"/>
+          <a:p>
+            <a:pPr algn="ctr"/>
+            <a:r>
+              <a:rPr lang="en-US" altLang="zh-CN" sz="1500"/>
+              <a:t>QoS</a:t>
+            </a:r>
+            <a:r>
+              <a:rPr lang="zh-CN" altLang="en-US" sz="1500"/>
+              <a:t>映射</a:t>
+            </a:r>
+            <a:endParaRPr lang="zh-CN" altLang="en-US" sz="1500"/>
+          </a:p>
+          <a:p>
+            <a:pPr algn="ctr"/>
+            <a:r>
+              <a:rPr lang="en-US" altLang="zh-CN" sz="1500"/>
+              <a:t>MAC</a:t>
+            </a:r>
+            <a:r>
+              <a:rPr lang="zh-CN" altLang="en-US" sz="1500"/>
+              <a:t>资源</a:t>
+            </a:r>
+            <a:r>
+              <a:rPr lang="zh-CN" altLang="en-US" sz="1500"/>
+              <a:t>调度</a:t>
+            </a:r>
+            <a:endParaRPr lang="zh-CN" altLang="en-US" sz="1500"/>
+          </a:p>
+        </p:txBody>
+      </p:sp>
+      <p:sp>
+        <p:nvSpPr>
+          <p:cNvPr id="53" name="圆角矩形 52"/>
+          <p:cNvSpPr/>
+          <p:nvPr/>
+        </p:nvSpPr>
+        <p:spPr>
+          <a:xfrm>
+            <a:off x="7791450" y="4725670"/>
+            <a:ext cx="952500" cy="713740"/>
+          </a:xfrm>
+          <a:prstGeom prst="roundRect">
+            <a:avLst/>
+          </a:prstGeom>
+        </p:spPr>
+        <p:style>
+          <a:lnRef idx="2">
+            <a:schemeClr val="accent1">
+              <a:lumMod val="75000"/>
+            </a:schemeClr>
+          </a:lnRef>
+          <a:fillRef idx="1">
+            <a:schemeClr val="accent1"/>
+          </a:fillRef>
+          <a:effectRef idx="0">
+            <a:srgbClr val="FFFFFF"/>
+          </a:effectRef>
+          <a:fontRef idx="minor">
+            <a:schemeClr val="lt1"/>
+          </a:fontRef>
+        </p:style>
+        <p:txBody>
+          <a:bodyPr rtlCol="0" anchor="ctr"/>
+          <a:p>
+            <a:pPr algn="ctr"/>
+            <a:r>
+              <a:rPr lang="en-US" altLang="zh-CN" sz="1500"/>
+              <a:t>IP</a:t>
+            </a:r>
+            <a:r>
+              <a:rPr lang="zh-CN" altLang="en-US" sz="1500"/>
+              <a:t>传输</a:t>
+            </a:r>
+            <a:r>
+              <a:rPr lang="en-US" altLang="zh-CN" sz="1500"/>
+              <a:t>/UPF</a:t>
+            </a:r>
+            <a:endParaRPr lang="en-US" altLang="zh-CN" sz="1500"/>
+          </a:p>
+        </p:txBody>
+      </p:sp>
+      <p:cxnSp>
+        <p:nvCxnSpPr>
+          <p:cNvPr id="54" name="直接箭头连接符 53"/>
+          <p:cNvCxnSpPr/>
+          <p:nvPr/>
+        </p:nvCxnSpPr>
+        <p:spPr>
+          <a:xfrm>
+            <a:off x="4440555" y="5082540"/>
+            <a:ext cx="1283335" cy="0"/>
+          </a:xfrm>
+          <a:prstGeom prst="straightConnector1">
+            <a:avLst/>
+          </a:prstGeom>
+          <a:ln w="25400">
+            <a:solidFill>
+              <a:schemeClr val="accent5">
+                <a:lumMod val="75000"/>
+              </a:schemeClr>
+            </a:solidFill>
+            <a:prstDash val="dashDot"/>
+            <a:headEnd type="arrow"/>
+            <a:tailEnd type="arrow"/>
+          </a:ln>
+        </p:spPr>
+        <p:style>
+          <a:lnRef idx="2">
+            <a:schemeClr val="accent1"/>
+          </a:lnRef>
+          <a:fillRef idx="0">
+            <a:srgbClr val="FFFFFF"/>
+          </a:fillRef>
+          <a:effectRef idx="0">
+            <a:srgbClr val="FFFFFF"/>
+          </a:effectRef>
+          <a:fontRef idx="minor">
+            <a:schemeClr val="tx1"/>
+          </a:fontRef>
+        </p:style>
+      </p:cxnSp>
+      <p:cxnSp>
+        <p:nvCxnSpPr>
+          <p:cNvPr id="55" name="直接箭头连接符 54"/>
+          <p:cNvCxnSpPr/>
+          <p:nvPr/>
+        </p:nvCxnSpPr>
+        <p:spPr>
+          <a:xfrm>
+            <a:off x="2214245" y="5082540"/>
+            <a:ext cx="1283335" cy="0"/>
+          </a:xfrm>
+          <a:prstGeom prst="straightConnector1">
+            <a:avLst/>
+          </a:prstGeom>
+          <a:ln w="25400">
+            <a:solidFill>
+              <a:schemeClr val="accent5">
+                <a:lumMod val="75000"/>
+              </a:schemeClr>
+            </a:solidFill>
+            <a:prstDash val="dashDot"/>
+            <a:headEnd type="arrow"/>
+            <a:tailEnd type="arrow"/>
+          </a:ln>
+        </p:spPr>
+        <p:style>
+          <a:lnRef idx="2">
+            <a:schemeClr val="accent1"/>
+          </a:lnRef>
+          <a:fillRef idx="0">
+            <a:srgbClr val="FFFFFF"/>
+          </a:fillRef>
+          <a:effectRef idx="0">
+            <a:srgbClr val="FFFFFF"/>
+          </a:effectRef>
+          <a:fontRef idx="minor">
+            <a:schemeClr val="tx1"/>
+          </a:fontRef>
+        </p:style>
+      </p:cxnSp>
+      <p:cxnSp>
+        <p:nvCxnSpPr>
+          <p:cNvPr id="56" name="直接箭头连接符 55"/>
+          <p:cNvCxnSpPr/>
+          <p:nvPr/>
+        </p:nvCxnSpPr>
+        <p:spPr>
+          <a:xfrm flipV="1">
+            <a:off x="6668770" y="5079365"/>
+            <a:ext cx="1124585" cy="0"/>
+          </a:xfrm>
+          <a:prstGeom prst="straightConnector1">
+            <a:avLst/>
+          </a:prstGeom>
+          <a:ln w="25400">
+            <a:solidFill>
+              <a:schemeClr val="accent5">
+                <a:lumMod val="75000"/>
+              </a:schemeClr>
+            </a:solidFill>
+            <a:prstDash val="dashDot"/>
+            <a:headEnd type="arrow"/>
+            <a:tailEnd type="arrow"/>
+          </a:ln>
+        </p:spPr>
+        <p:style>
+          <a:lnRef idx="2">
+            <a:schemeClr val="accent1"/>
+          </a:lnRef>
+          <a:fillRef idx="0">
+            <a:srgbClr val="FFFFFF"/>
+          </a:fillRef>
+          <a:effectRef idx="0">
+            <a:srgbClr val="FFFFFF"/>
+          </a:effectRef>
+          <a:fontRef idx="minor">
+            <a:schemeClr val="tx1"/>
+          </a:fontRef>
+        </p:style>
+      </p:cxnSp>
+      <p:cxnSp>
+        <p:nvCxnSpPr>
+          <p:cNvPr id="57" name="直接箭头连接符 56"/>
+          <p:cNvCxnSpPr/>
+          <p:nvPr/>
+        </p:nvCxnSpPr>
+        <p:spPr>
+          <a:xfrm>
+            <a:off x="2214245" y="6017260"/>
+            <a:ext cx="1283335" cy="0"/>
+          </a:xfrm>
+          <a:prstGeom prst="straightConnector1">
+            <a:avLst/>
+          </a:prstGeom>
+          <a:ln w="25400">
+            <a:solidFill>
+              <a:schemeClr val="accent2">
+                <a:lumMod val="75000"/>
+              </a:schemeClr>
+            </a:solidFill>
+            <a:prstDash val="dashDot"/>
+            <a:headEnd type="arrow"/>
+            <a:tailEnd type="arrow"/>
+          </a:ln>
+        </p:spPr>
+        <p:style>
+          <a:lnRef idx="2">
+            <a:schemeClr val="accent1"/>
+          </a:lnRef>
+          <a:fillRef idx="0">
+            <a:srgbClr val="FFFFFF"/>
+          </a:fillRef>
+          <a:effectRef idx="0">
+            <a:srgbClr val="FFFFFF"/>
+          </a:effectRef>
+          <a:fontRef idx="minor">
+            <a:schemeClr val="tx1"/>
+          </a:fontRef>
+        </p:style>
+      </p:cxnSp>
+      <p:sp>
+        <p:nvSpPr>
+          <p:cNvPr id="2" name="圆角矩形 1"/>
+          <p:cNvSpPr/>
+          <p:nvPr/>
+        </p:nvSpPr>
+        <p:spPr>
+          <a:xfrm>
+            <a:off x="5730240" y="5660390"/>
+            <a:ext cx="952500" cy="713740"/>
+          </a:xfrm>
+          <a:prstGeom prst="roundRect">
+            <a:avLst/>
+          </a:prstGeom>
+        </p:spPr>
+        <p:style>
+          <a:lnRef idx="2">
+            <a:schemeClr val="accent1">
+              <a:lumMod val="75000"/>
+            </a:schemeClr>
+          </a:lnRef>
+          <a:fillRef idx="1">
+            <a:schemeClr val="accent1"/>
+          </a:fillRef>
+          <a:effectRef idx="0">
+            <a:srgbClr val="FFFFFF"/>
+          </a:effectRef>
+          <a:fontRef idx="minor">
+            <a:schemeClr val="lt1"/>
+          </a:fontRef>
+        </p:style>
+        <p:txBody>
+          <a:bodyPr rtlCol="0" anchor="ctr"/>
+          <a:p>
+            <a:pPr algn="ctr"/>
+            <a:r>
+              <a:rPr lang="en-US" altLang="zh-CN" sz="1500"/>
+              <a:t>QoS</a:t>
+            </a:r>
+            <a:r>
+              <a:rPr lang="zh-CN" altLang="en-US" sz="1500"/>
+              <a:t>映射</a:t>
+            </a:r>
+            <a:endParaRPr lang="zh-CN" altLang="en-US" sz="1500"/>
+          </a:p>
+          <a:p>
+            <a:pPr algn="ctr"/>
+            <a:r>
+              <a:rPr lang="en-US" altLang="zh-CN" sz="1500"/>
+              <a:t>MAC</a:t>
+            </a:r>
+            <a:r>
+              <a:rPr lang="zh-CN" altLang="en-US" sz="1500"/>
+              <a:t>资源</a:t>
+            </a:r>
+            <a:r>
+              <a:rPr lang="zh-CN" altLang="en-US" sz="1500"/>
+              <a:t>调度</a:t>
+            </a:r>
+            <a:endParaRPr lang="zh-CN" altLang="en-US" sz="1500"/>
+          </a:p>
+        </p:txBody>
+      </p:sp>
+      <p:sp>
+        <p:nvSpPr>
+          <p:cNvPr id="3" name="圆角矩形 2"/>
+          <p:cNvSpPr/>
+          <p:nvPr/>
+        </p:nvSpPr>
+        <p:spPr>
+          <a:xfrm>
+            <a:off x="1245870" y="3807460"/>
+            <a:ext cx="952500" cy="713740"/>
+          </a:xfrm>
+          <a:prstGeom prst="roundRect">
+            <a:avLst/>
+          </a:prstGeom>
+        </p:spPr>
+        <p:style>
+          <a:lnRef idx="2">
+            <a:schemeClr val="accent1">
+              <a:lumMod val="75000"/>
+            </a:schemeClr>
+          </a:lnRef>
+          <a:fillRef idx="1">
+            <a:schemeClr val="accent1"/>
+          </a:fillRef>
+          <a:effectRef idx="0">
+            <a:srgbClr val="FFFFFF"/>
+          </a:effectRef>
+          <a:fontRef idx="minor">
+            <a:schemeClr val="lt1"/>
+          </a:fontRef>
+        </p:style>
+        <p:txBody>
+          <a:bodyPr rtlCol="0" anchor="ctr"/>
+          <a:p>
+            <a:pPr algn="ctr"/>
+            <a:r>
+              <a:rPr lang="zh-CN" altLang="en-US" sz="1500"/>
+              <a:t>邻域</a:t>
+            </a:r>
+            <a:endParaRPr lang="zh-CN" altLang="en-US" sz="1500"/>
+          </a:p>
+          <a:p>
+            <a:pPr algn="ctr"/>
+            <a:r>
+              <a:rPr lang="zh-CN" altLang="en-US" sz="1500"/>
+              <a:t>感知</a:t>
+            </a:r>
+            <a:endParaRPr lang="zh-CN" altLang="en-US" sz="1500"/>
+          </a:p>
+        </p:txBody>
+      </p:sp>
+      <p:cxnSp>
+        <p:nvCxnSpPr>
+          <p:cNvPr id="11" name="直接连接符 10"/>
+          <p:cNvCxnSpPr/>
+          <p:nvPr/>
+        </p:nvCxnSpPr>
+        <p:spPr>
+          <a:xfrm>
+            <a:off x="1722755" y="4521200"/>
+            <a:ext cx="0" cy="216000"/>
+          </a:xfrm>
+          <a:prstGeom prst="line">
+            <a:avLst/>
+          </a:prstGeom>
+          <a:ln w="19050">
+            <a:solidFill>
+              <a:schemeClr val="tx1"/>
+            </a:solidFill>
+            <a:headEnd type="triangle"/>
+            <a:tailEnd type="triangle"/>
+          </a:ln>
+        </p:spPr>
+        <p:style>
+          <a:lnRef idx="2">
+            <a:schemeClr val="accent1"/>
+          </a:lnRef>
+          <a:fillRef idx="0">
+            <a:srgbClr val="FFFFFF"/>
+          </a:fillRef>
+          <a:effectRef idx="0">
+            <a:srgbClr val="FFFFFF"/>
+          </a:effectRef>
+          <a:fontRef idx="minor">
+            <a:schemeClr val="tx1"/>
+          </a:fontRef>
+        </p:style>
+      </p:cxnSp>
+      <p:cxnSp>
+        <p:nvCxnSpPr>
+          <p:cNvPr id="16" name="直接连接符 15"/>
+          <p:cNvCxnSpPr/>
+          <p:nvPr/>
+        </p:nvCxnSpPr>
+        <p:spPr>
+          <a:xfrm>
+            <a:off x="3973830" y="4521200"/>
+            <a:ext cx="0" cy="216000"/>
+          </a:xfrm>
+          <a:prstGeom prst="line">
+            <a:avLst/>
+          </a:prstGeom>
+          <a:ln w="19050">
+            <a:solidFill>
+              <a:schemeClr val="tx1"/>
+            </a:solidFill>
+            <a:headEnd type="triangle"/>
+            <a:tailEnd type="triangle"/>
+          </a:ln>
+        </p:spPr>
+        <p:style>
+          <a:lnRef idx="2">
+            <a:schemeClr val="accent1"/>
+          </a:lnRef>
+          <a:fillRef idx="0">
+            <a:srgbClr val="FFFFFF"/>
+          </a:fillRef>
+          <a:effectRef idx="0">
+            <a:srgbClr val="FFFFFF"/>
+          </a:effectRef>
+          <a:fontRef idx="minor">
+            <a:schemeClr val="tx1"/>
+          </a:fontRef>
+        </p:style>
+      </p:cxnSp>
+      <p:cxnSp>
+        <p:nvCxnSpPr>
+          <p:cNvPr id="17" name="直接连接符 16"/>
+          <p:cNvCxnSpPr/>
+          <p:nvPr/>
+        </p:nvCxnSpPr>
+        <p:spPr>
+          <a:xfrm>
+            <a:off x="6214110" y="4521200"/>
+            <a:ext cx="0" cy="216000"/>
+          </a:xfrm>
+          <a:prstGeom prst="line">
+            <a:avLst/>
+          </a:prstGeom>
+          <a:ln w="19050">
+            <a:solidFill>
+              <a:schemeClr val="tx1"/>
+            </a:solidFill>
+            <a:headEnd type="triangle"/>
+            <a:tailEnd type="triangle"/>
+          </a:ln>
+        </p:spPr>
+        <p:style>
+          <a:lnRef idx="2">
+            <a:schemeClr val="accent1"/>
+          </a:lnRef>
+          <a:fillRef idx="0">
+            <a:srgbClr val="FFFFFF"/>
+          </a:fillRef>
+          <a:effectRef idx="0">
+            <a:srgbClr val="FFFFFF"/>
+          </a:effectRef>
+          <a:fontRef idx="minor">
+            <a:schemeClr val="tx1"/>
+          </a:fontRef>
+        </p:style>
+      </p:cxnSp>
     </p:spTree>
   </p:cSld>
   <p:clrMapOvr>
